--- a/project/exports/Nexus_Production_Deep_Dive.pptx
+++ b/project/exports/Nexus_Production_Deep_Dive.pptx
@@ -16,6 +16,7 @@
     <p:sldId id="264" r:id="rId16"/>
     <p:sldId id="265" r:id="rId17"/>
     <p:sldId id="266" r:id="rId18"/>
+    <p:sldId id="267" r:id="rId19"/>
   </p:sldIdLst>
   <p:sldSz cx="9144000" cy="6858000" type="screen4x3"/>
   <p:notesSz cx="6858000" cy="9144000"/>
@@ -658,7 +659,7 @@
           <a:lstStyle/>
           <a:p>
             <a:r>
-              <a:t>Screenshot: image-4baec4b8-06cf-4b6b-b561-bed0e6f26bf7.png</a:t>
+              <a:t>Screenshot: 01-chat.png</a:t>
             </a:r>
           </a:p>
           <a:p/>
@@ -734,7 +735,7 @@
           <a:lstStyle/>
           <a:p>
             <a:r>
-              <a:t>Screenshot: image-60843011-a065-479f-aa5f-46574e57ddc6.png</a:t>
+              <a:t>Screenshot: 04-integrations.png</a:t>
             </a:r>
           </a:p>
           <a:p/>
@@ -3822,47 +3823,66 @@
           <a:lstStyle/>
           <a:p>
             <a:r>
-              <a:t>Why This Helps Industry</a:t>
-            </a:r>
-          </a:p>
-        </p:txBody>
-      </p:sp>
-      <p:sp>
-        <p:nvSpPr>
-          <p:cNvPr id="3" name="Content Placeholder 2"/>
-          <p:cNvSpPr>
-            <a:spLocks noGrp="1"/>
-          </p:cNvSpPr>
-          <p:nvPr>
-            <p:ph idx="1"/>
-          </p:nvPr>
-        </p:nvSpPr>
-        <p:spPr/>
-        <p:txBody>
-          <a:bodyPr/>
-          <a:lstStyle/>
-          <a:p>
-            <a:pPr/>
-            <a:r>
-              <a:t>Composable platform: swap LLMs, CRMs, ticketing systems</a:t>
-            </a:r>
-          </a:p>
-          <a:p>
-            <a:pPr/>
-            <a:r>
-              <a:t>Clear security posture: auth-first, admin-only config, audit log</a:t>
-            </a:r>
-          </a:p>
-          <a:p>
-            <a:pPr/>
-            <a:r>
-              <a:t>Operational maturity: backups, systemd, health checks</a:t>
-            </a:r>
-          </a:p>
-          <a:p>
-            <a:pPr/>
-            <a:r>
-              <a:t>Roadmap-ready: Postgres/Redis scale path without redesign</a:t>
+              <a:t>Product UI — Example 3</a:t>
+            </a:r>
+          </a:p>
+        </p:txBody>
+      </p:sp>
+      <p:pic>
+        <p:nvPicPr>
+          <p:cNvPr id="3" name="Picture 2" descr="04-integrations.png"/>
+          <p:cNvPicPr>
+            <a:picLocks noChangeAspect="1"/>
+          </p:cNvPicPr>
+          <p:nvPr/>
+        </p:nvPicPr>
+        <p:blipFill>
+          <a:blip r:embed="rId2"/>
+          <a:stretch>
+            <a:fillRect/>
+          </a:stretch>
+        </p:blipFill>
+        <p:spPr>
+          <a:xfrm>
+            <a:off x="731520" y="1280160"/>
+            <a:ext cx="2580862" cy="4754880"/>
+          </a:xfrm>
+          <a:prstGeom prst="rect">
+            <a:avLst/>
+          </a:prstGeom>
+        </p:spPr>
+      </p:pic>
+      <p:sp>
+        <p:nvSpPr>
+          <p:cNvPr id="4" name="TextBox 3"/>
+          <p:cNvSpPr txBox="1"/>
+          <p:nvPr/>
+        </p:nvSpPr>
+        <p:spPr>
+          <a:xfrm>
+            <a:off x="731520" y="6126480"/>
+            <a:ext cx="10972800" cy="457200"/>
+          </a:xfrm>
+          <a:prstGeom prst="rect">
+            <a:avLst/>
+          </a:prstGeom>
+          <a:noFill/>
+        </p:spPr>
+        <p:txBody>
+          <a:bodyPr wrap="none">
+            <a:spAutoFit/>
+          </a:bodyPr>
+          <a:lstStyle/>
+          <a:p>
+            <a:pPr>
+              <a:defRPr sz="1400">
+                <a:solidFill>
+                  <a:srgbClr val="64748B"/>
+                </a:solidFill>
+              </a:defRPr>
+            </a:pPr>
+            <a:r>
+              <a:t>Integrations catalog — 62 native connectors (CRM, CCaaS, BI, HRIS, and more)</a:t>
             </a:r>
           </a:p>
         </p:txBody>
@@ -3901,6 +3921,85 @@
           <a:lstStyle/>
           <a:p>
             <a:r>
+              <a:t>Why This Helps Industry</a:t>
+            </a:r>
+          </a:p>
+        </p:txBody>
+      </p:sp>
+      <p:sp>
+        <p:nvSpPr>
+          <p:cNvPr id="3" name="Content Placeholder 2"/>
+          <p:cNvSpPr>
+            <a:spLocks noGrp="1"/>
+          </p:cNvSpPr>
+          <p:nvPr>
+            <p:ph idx="1"/>
+          </p:nvPr>
+        </p:nvSpPr>
+        <p:spPr/>
+        <p:txBody>
+          <a:bodyPr/>
+          <a:lstStyle/>
+          <a:p>
+            <a:pPr/>
+            <a:r>
+              <a:t>62 native integrations — CRM, ticketing, telephony, BI, and HRIS out of the box</a:t>
+            </a:r>
+          </a:p>
+          <a:p>
+            <a:pPr/>
+            <a:r>
+              <a:t>Composable platform: swap LLMs, connectors, and automation flows</a:t>
+            </a:r>
+          </a:p>
+          <a:p>
+            <a:pPr/>
+            <a:r>
+              <a:t>Clear security posture: auth-first, encrypted vault, audit log</a:t>
+            </a:r>
+          </a:p>
+          <a:p>
+            <a:pPr/>
+            <a:r>
+              <a:t>Operational maturity: backups, systemd, health checks, 215+ automated tests</a:t>
+            </a:r>
+          </a:p>
+        </p:txBody>
+      </p:sp>
+    </p:spTree>
+  </p:cSld>
+  <p:clrMapOvr>
+    <a:masterClrMapping/>
+  </p:clrMapOvr>
+</p:sld>
+</file>
+
+<file path=ppt/slides/slide12.xml><?xml version="1.0" encoding="utf-8"?>
+<p:sld xmlns:a="http://schemas.openxmlformats.org/drawingml/2006/main" xmlns:p="http://schemas.openxmlformats.org/presentationml/2006/main" xmlns:r="http://schemas.openxmlformats.org/officeDocument/2006/relationships">
+  <p:cSld>
+    <p:spTree>
+      <p:nvGrpSpPr>
+        <p:cNvPr id="1" name=""/>
+        <p:cNvGrpSpPr/>
+        <p:nvPr/>
+      </p:nvGrpSpPr>
+      <p:grpSpPr/>
+      <p:sp>
+        <p:nvSpPr>
+          <p:cNvPr id="2" name="Title 1"/>
+          <p:cNvSpPr>
+            <a:spLocks noGrp="1"/>
+          </p:cNvSpPr>
+          <p:nvPr>
+            <p:ph type="title"/>
+          </p:nvPr>
+        </p:nvSpPr>
+        <p:spPr/>
+        <p:txBody>
+          <a:bodyPr/>
+          <a:lstStyle/>
+          <a:p>
+            <a:r>
               <a:t>Next Steps</a:t>
             </a:r>
           </a:p>
@@ -4350,6 +4449,85 @@
 </file>
 
 <file path=ppt/slides/slide7.xml><?xml version="1.0" encoding="utf-8"?>
+<p:sld xmlns:a="http://schemas.openxmlformats.org/drawingml/2006/main" xmlns:p="http://schemas.openxmlformats.org/presentationml/2006/main" xmlns:r="http://schemas.openxmlformats.org/officeDocument/2006/relationships">
+  <p:cSld>
+    <p:spTree>
+      <p:nvGrpSpPr>
+        <p:cNvPr id="1" name=""/>
+        <p:cNvGrpSpPr/>
+        <p:nvPr/>
+      </p:nvGrpSpPr>
+      <p:grpSpPr/>
+      <p:sp>
+        <p:nvSpPr>
+          <p:cNvPr id="2" name="Title 1"/>
+          <p:cNvSpPr>
+            <a:spLocks noGrp="1"/>
+          </p:cNvSpPr>
+          <p:nvPr>
+            <p:ph type="title"/>
+          </p:nvPr>
+        </p:nvSpPr>
+        <p:spPr/>
+        <p:txBody>
+          <a:bodyPr/>
+          <a:lstStyle/>
+          <a:p>
+            <a:r>
+              <a:t>Integrations (62 native connectors)</a:t>
+            </a:r>
+          </a:p>
+        </p:txBody>
+      </p:sp>
+      <p:sp>
+        <p:nvSpPr>
+          <p:cNvPr id="3" name="Content Placeholder 2"/>
+          <p:cNvSpPr>
+            <a:spLocks noGrp="1"/>
+          </p:cNvSpPr>
+          <p:nvPr>
+            <p:ph idx="1"/>
+          </p:nvPr>
+        </p:nvSpPr>
+        <p:spPr/>
+        <p:txBody>
+          <a:bodyPr/>
+          <a:lstStyle/>
+          <a:p>
+            <a:pPr/>
+            <a:r>
+              <a:t>Public catalog at /integrations — searchable by category (CRM, ticketing, CCaaS, BI, HRIS, …)</a:t>
+            </a:r>
+          </a:p>
+          <a:p>
+            <a:pPr/>
+            <a:r>
+              <a:t>Each connector: encrypted vault credentials, status API, and proxy routes</a:t>
+            </a:r>
+          </a:p>
+          <a:p>
+            <a:pPr/>
+            <a:r>
+              <a:t>Examples: HubSpot, Salesforce, Zendesk, Freshdesk, PagerDuty, Snowflake, Epic, Workday</a:t>
+            </a:r>
+          </a:p>
+          <a:p>
+            <a:pPr/>
+            <a:r>
+              <a:t>iPaaS webhooks (n8n/Zapier) alongside native adapters for lifecycle events</a:t>
+            </a:r>
+          </a:p>
+        </p:txBody>
+      </p:sp>
+    </p:spTree>
+  </p:cSld>
+  <p:clrMapOvr>
+    <a:masterClrMapping/>
+  </p:clrMapOvr>
+</p:sld>
+</file>
+
+<file path=ppt/slides/slide8.xml><?xml version="1.0" encoding="utf-8"?>
 <p:sld xmlns:a="http://schemas.openxmlformats.org/drawingml/2006/main" xmlns:p="http://schemas.openxmlformats.org/presentationml/2006/main" xmlns:r="http://schemas.openxmlformats.org/officeDocument/2006/relationships">
   <p:cSld>
     <p:spTree>
@@ -4447,7 +4625,7 @@
 </p:sld>
 </file>
 
-<file path=ppt/slides/slide8.xml><?xml version="1.0" encoding="utf-8"?>
+<file path=ppt/slides/slide9.xml><?xml version="1.0" encoding="utf-8"?>
 <p:sld xmlns:a="http://schemas.openxmlformats.org/drawingml/2006/main" xmlns:p="http://schemas.openxmlformats.org/presentationml/2006/main" xmlns:r="http://schemas.openxmlformats.org/officeDocument/2006/relationships">
   <p:cSld>
     <p:spTree>
@@ -4480,7 +4658,7 @@
       </p:sp>
       <p:pic>
         <p:nvPicPr>
-          <p:cNvPr id="3" name="Picture 2" descr="image-4baec4b8-06cf-4b6b-b561-bed0e6f26bf7.png"/>
+          <p:cNvPr id="3" name="Picture 2" descr="01-chat.png"/>
           <p:cNvPicPr>
             <a:picLocks noChangeAspect="1"/>
           </p:cNvPicPr>
@@ -4495,7 +4673,7 @@
         <p:spPr>
           <a:xfrm>
             <a:off x="731520" y="1280160"/>
-            <a:ext cx="5000732" cy="4754880"/>
+            <a:ext cx="7607808" cy="4754880"/>
           </a:xfrm>
           <a:prstGeom prst="rect">
             <a:avLst/>
@@ -4532,105 +4710,7 @@
               </a:defRPr>
             </a:pPr>
             <a:r>
-              <a:t>Nexus console UI (chat/cases console)</a:t>
-            </a:r>
-          </a:p>
-        </p:txBody>
-      </p:sp>
-    </p:spTree>
-  </p:cSld>
-  <p:clrMapOvr>
-    <a:masterClrMapping/>
-  </p:clrMapOvr>
-</p:sld>
-</file>
-
-<file path=ppt/slides/slide9.xml><?xml version="1.0" encoding="utf-8"?>
-<p:sld xmlns:a="http://schemas.openxmlformats.org/drawingml/2006/main" xmlns:p="http://schemas.openxmlformats.org/presentationml/2006/main" xmlns:r="http://schemas.openxmlformats.org/officeDocument/2006/relationships">
-  <p:cSld>
-    <p:spTree>
-      <p:nvGrpSpPr>
-        <p:cNvPr id="1" name=""/>
-        <p:cNvGrpSpPr/>
-        <p:nvPr/>
-      </p:nvGrpSpPr>
-      <p:grpSpPr/>
-      <p:sp>
-        <p:nvSpPr>
-          <p:cNvPr id="2" name="Title 1"/>
-          <p:cNvSpPr>
-            <a:spLocks noGrp="1"/>
-          </p:cNvSpPr>
-          <p:nvPr>
-            <p:ph type="title"/>
-          </p:nvPr>
-        </p:nvSpPr>
-        <p:spPr/>
-        <p:txBody>
-          <a:bodyPr/>
-          <a:lstStyle/>
-          <a:p>
-            <a:r>
-              <a:t>Product UI — Example 3</a:t>
-            </a:r>
-          </a:p>
-        </p:txBody>
-      </p:sp>
-      <p:pic>
-        <p:nvPicPr>
-          <p:cNvPr id="3" name="Picture 2" descr="image-60843011-a065-479f-aa5f-46574e57ddc6.png"/>
-          <p:cNvPicPr>
-            <a:picLocks noChangeAspect="1"/>
-          </p:cNvPicPr>
-          <p:nvPr/>
-        </p:nvPicPr>
-        <p:blipFill>
-          <a:blip r:embed="rId2"/>
-          <a:stretch>
-            <a:fillRect/>
-          </a:stretch>
-        </p:blipFill>
-        <p:spPr>
-          <a:xfrm>
-            <a:off x="731520" y="1280160"/>
-            <a:ext cx="3835992" cy="4754880"/>
-          </a:xfrm>
-          <a:prstGeom prst="rect">
-            <a:avLst/>
-          </a:prstGeom>
-        </p:spPr>
-      </p:pic>
-      <p:sp>
-        <p:nvSpPr>
-          <p:cNvPr id="4" name="TextBox 3"/>
-          <p:cNvSpPr txBox="1"/>
-          <p:nvPr/>
-        </p:nvSpPr>
-        <p:spPr>
-          <a:xfrm>
-            <a:off x="731520" y="6126480"/>
-            <a:ext cx="10972800" cy="457200"/>
-          </a:xfrm>
-          <a:prstGeom prst="rect">
-            <a:avLst/>
-          </a:prstGeom>
-          <a:noFill/>
-        </p:spPr>
-        <p:txBody>
-          <a:bodyPr wrap="none">
-            <a:spAutoFit/>
-          </a:bodyPr>
-          <a:lstStyle/>
-          <a:p>
-            <a:pPr>
-              <a:defRPr sz="1400">
-                <a:solidFill>
-                  <a:srgbClr val="64748B"/>
-                </a:solidFill>
-              </a:defRPr>
-            </a:pPr>
-            <a:r>
-              <a:t>Integrations settings (keys stored encrypted server-side)</a:t>
+              <a:t>Nexus console UI (chat / copilot / voice)</a:t>
             </a:r>
           </a:p>
         </p:txBody>

--- a/project/exports/Nexus_Production_Deep_Dive.pptx
+++ b/project/exports/Nexus_Production_Deep_Dive.pptx
@@ -3844,7 +3844,7 @@
         </p:blipFill>
         <p:spPr>
           <a:xfrm>
-            <a:off x="731520" y="1280160"/>
+            <a:off x="3281569" y="1280160"/>
             <a:ext cx="2580862" cy="4754880"/>
           </a:xfrm>
           <a:prstGeom prst="rect">
@@ -4574,7 +4574,7 @@
         </p:blipFill>
         <p:spPr>
           <a:xfrm>
-            <a:off x="731520" y="1280160"/>
+            <a:off x="2802835" y="1280160"/>
             <a:ext cx="3538330" cy="4754880"/>
           </a:xfrm>
           <a:prstGeom prst="rect">
@@ -4672,7 +4672,7 @@
         </p:blipFill>
         <p:spPr>
           <a:xfrm>
-            <a:off x="731520" y="1280160"/>
+            <a:off x="768096" y="1280160"/>
             <a:ext cx="7607808" cy="4754880"/>
           </a:xfrm>
           <a:prstGeom prst="rect">
